--- a/+100_latex_all_math_sel/mathLatex_线性代数/img/线性代数演示.pptx
+++ b/+100_latex_all_math_sel/mathLatex_线性代数/img/线性代数演示.pptx
@@ -6,6 +6,7 @@
   </p:sldMasterIdLst>
   <p:sldIdLst>
     <p:sldId id="256" r:id="rId2"/>
+    <p:sldId id="257" r:id="rId3"/>
   </p:sldIdLst>
   <p:sldSz cx="12192000" cy="6858000"/>
   <p:notesSz cx="6858000" cy="9144000"/>
@@ -259,7 +260,7 @@
           <a:p>
             <a:fld id="{0BAD5452-5809-4E26-953E-7653194D16BD}" type="datetimeFigureOut">
               <a:rPr lang="zh-CN" altLang="en-US" smtClean="0"/>
-              <a:t>2023/3/16</a:t>
+              <a:t>2023/3/20</a:t>
             </a:fld>
             <a:endParaRPr lang="zh-CN" altLang="en-US"/>
           </a:p>
@@ -457,7 +458,7 @@
           <a:p>
             <a:fld id="{0BAD5452-5809-4E26-953E-7653194D16BD}" type="datetimeFigureOut">
               <a:rPr lang="zh-CN" altLang="en-US" smtClean="0"/>
-              <a:t>2023/3/16</a:t>
+              <a:t>2023/3/20</a:t>
             </a:fld>
             <a:endParaRPr lang="zh-CN" altLang="en-US"/>
           </a:p>
@@ -665,7 +666,7 @@
           <a:p>
             <a:fld id="{0BAD5452-5809-4E26-953E-7653194D16BD}" type="datetimeFigureOut">
               <a:rPr lang="zh-CN" altLang="en-US" smtClean="0"/>
-              <a:t>2023/3/16</a:t>
+              <a:t>2023/3/20</a:t>
             </a:fld>
             <a:endParaRPr lang="zh-CN" altLang="en-US"/>
           </a:p>
@@ -863,7 +864,7 @@
           <a:p>
             <a:fld id="{0BAD5452-5809-4E26-953E-7653194D16BD}" type="datetimeFigureOut">
               <a:rPr lang="zh-CN" altLang="en-US" smtClean="0"/>
-              <a:t>2023/3/16</a:t>
+              <a:t>2023/3/20</a:t>
             </a:fld>
             <a:endParaRPr lang="zh-CN" altLang="en-US"/>
           </a:p>
@@ -1138,7 +1139,7 @@
           <a:p>
             <a:fld id="{0BAD5452-5809-4E26-953E-7653194D16BD}" type="datetimeFigureOut">
               <a:rPr lang="zh-CN" altLang="en-US" smtClean="0"/>
-              <a:t>2023/3/16</a:t>
+              <a:t>2023/3/20</a:t>
             </a:fld>
             <a:endParaRPr lang="zh-CN" altLang="en-US"/>
           </a:p>
@@ -1403,7 +1404,7 @@
           <a:p>
             <a:fld id="{0BAD5452-5809-4E26-953E-7653194D16BD}" type="datetimeFigureOut">
               <a:rPr lang="zh-CN" altLang="en-US" smtClean="0"/>
-              <a:t>2023/3/16</a:t>
+              <a:t>2023/3/20</a:t>
             </a:fld>
             <a:endParaRPr lang="zh-CN" altLang="en-US"/>
           </a:p>
@@ -1815,7 +1816,7 @@
           <a:p>
             <a:fld id="{0BAD5452-5809-4E26-953E-7653194D16BD}" type="datetimeFigureOut">
               <a:rPr lang="zh-CN" altLang="en-US" smtClean="0"/>
-              <a:t>2023/3/16</a:t>
+              <a:t>2023/3/20</a:t>
             </a:fld>
             <a:endParaRPr lang="zh-CN" altLang="en-US"/>
           </a:p>
@@ -1956,7 +1957,7 @@
           <a:p>
             <a:fld id="{0BAD5452-5809-4E26-953E-7653194D16BD}" type="datetimeFigureOut">
               <a:rPr lang="zh-CN" altLang="en-US" smtClean="0"/>
-              <a:t>2023/3/16</a:t>
+              <a:t>2023/3/20</a:t>
             </a:fld>
             <a:endParaRPr lang="zh-CN" altLang="en-US"/>
           </a:p>
@@ -2069,7 +2070,7 @@
           <a:p>
             <a:fld id="{0BAD5452-5809-4E26-953E-7653194D16BD}" type="datetimeFigureOut">
               <a:rPr lang="zh-CN" altLang="en-US" smtClean="0"/>
-              <a:t>2023/3/16</a:t>
+              <a:t>2023/3/20</a:t>
             </a:fld>
             <a:endParaRPr lang="zh-CN" altLang="en-US"/>
           </a:p>
@@ -2380,7 +2381,7 @@
           <a:p>
             <a:fld id="{0BAD5452-5809-4E26-953E-7653194D16BD}" type="datetimeFigureOut">
               <a:rPr lang="zh-CN" altLang="en-US" smtClean="0"/>
-              <a:t>2023/3/16</a:t>
+              <a:t>2023/3/20</a:t>
             </a:fld>
             <a:endParaRPr lang="zh-CN" altLang="en-US"/>
           </a:p>
@@ -2668,7 +2669,7 @@
           <a:p>
             <a:fld id="{0BAD5452-5809-4E26-953E-7653194D16BD}" type="datetimeFigureOut">
               <a:rPr lang="zh-CN" altLang="en-US" smtClean="0"/>
-              <a:t>2023/3/16</a:t>
+              <a:t>2023/3/20</a:t>
             </a:fld>
             <a:endParaRPr lang="zh-CN" altLang="en-US"/>
           </a:p>
@@ -2909,7 +2910,7 @@
           <a:p>
             <a:fld id="{0BAD5452-5809-4E26-953E-7653194D16BD}" type="datetimeFigureOut">
               <a:rPr lang="zh-CN" altLang="en-US" smtClean="0"/>
-              <a:t>2023/3/16</a:t>
+              <a:t>2023/3/20</a:t>
             </a:fld>
             <a:endParaRPr lang="zh-CN" altLang="en-US"/>
           </a:p>
@@ -4554,10 +4555,935 @@
           </a:p>
         </p:txBody>
       </p:sp>
+      <p:cxnSp>
+        <p:nvCxnSpPr>
+          <p:cNvPr id="6" name="直接连接符 5">
+            <a:extLst>
+              <a:ext uri="{FF2B5EF4-FFF2-40B4-BE49-F238E27FC236}">
+                <a16:creationId xmlns:a16="http://schemas.microsoft.com/office/drawing/2014/main" id="{07220EE0-AABC-1186-7A3C-9AEDE63DBFDE}"/>
+              </a:ext>
+            </a:extLst>
+          </p:cNvPr>
+          <p:cNvCxnSpPr>
+            <a:cxnSpLocks/>
+          </p:cNvCxnSpPr>
+          <p:nvPr/>
+        </p:nvCxnSpPr>
+        <p:spPr>
+          <a:xfrm>
+            <a:off x="3802474" y="1450176"/>
+            <a:ext cx="736934" cy="0"/>
+          </a:xfrm>
+          <a:prstGeom prst="line">
+            <a:avLst/>
+          </a:prstGeom>
+          <a:noFill/>
+          <a:ln w="101600">
+            <a:solidFill>
+              <a:srgbClr val="92D050">
+                <a:alpha val="50000"/>
+              </a:srgbClr>
+            </a:solidFill>
+          </a:ln>
+        </p:spPr>
+        <p:style>
+          <a:lnRef idx="2">
+            <a:schemeClr val="accent1">
+              <a:shade val="50000"/>
+            </a:schemeClr>
+          </a:lnRef>
+          <a:fillRef idx="1">
+            <a:schemeClr val="accent1"/>
+          </a:fillRef>
+          <a:effectRef idx="0">
+            <a:schemeClr val="accent1"/>
+          </a:effectRef>
+          <a:fontRef idx="minor">
+            <a:schemeClr val="lt1"/>
+          </a:fontRef>
+        </p:style>
+      </p:cxnSp>
+      <p:cxnSp>
+        <p:nvCxnSpPr>
+          <p:cNvPr id="7" name="直接连接符 6">
+            <a:extLst>
+              <a:ext uri="{FF2B5EF4-FFF2-40B4-BE49-F238E27FC236}">
+                <a16:creationId xmlns:a16="http://schemas.microsoft.com/office/drawing/2014/main" id="{AC5BC478-7013-E600-1FC3-DE6DD6712BEC}"/>
+              </a:ext>
+            </a:extLst>
+          </p:cNvPr>
+          <p:cNvCxnSpPr>
+            <a:cxnSpLocks/>
+          </p:cNvCxnSpPr>
+          <p:nvPr/>
+        </p:nvCxnSpPr>
+        <p:spPr>
+          <a:xfrm>
+            <a:off x="3802474" y="1766179"/>
+            <a:ext cx="736934" cy="0"/>
+          </a:xfrm>
+          <a:prstGeom prst="line">
+            <a:avLst/>
+          </a:prstGeom>
+          <a:noFill/>
+          <a:ln w="101600">
+            <a:solidFill>
+              <a:srgbClr val="00B0F0">
+                <a:alpha val="30000"/>
+              </a:srgbClr>
+            </a:solidFill>
+          </a:ln>
+        </p:spPr>
+        <p:style>
+          <a:lnRef idx="2">
+            <a:schemeClr val="accent1">
+              <a:shade val="50000"/>
+            </a:schemeClr>
+          </a:lnRef>
+          <a:fillRef idx="1">
+            <a:schemeClr val="accent1"/>
+          </a:fillRef>
+          <a:effectRef idx="0">
+            <a:schemeClr val="accent1"/>
+          </a:effectRef>
+          <a:fontRef idx="minor">
+            <a:schemeClr val="lt1"/>
+          </a:fontRef>
+        </p:style>
+      </p:cxnSp>
+      <p:cxnSp>
+        <p:nvCxnSpPr>
+          <p:cNvPr id="8" name="直接连接符 7">
+            <a:extLst>
+              <a:ext uri="{FF2B5EF4-FFF2-40B4-BE49-F238E27FC236}">
+                <a16:creationId xmlns:a16="http://schemas.microsoft.com/office/drawing/2014/main" id="{002BB4B1-AC6D-827C-DC14-CA42742D6509}"/>
+              </a:ext>
+            </a:extLst>
+          </p:cNvPr>
+          <p:cNvCxnSpPr>
+            <a:cxnSpLocks/>
+          </p:cNvCxnSpPr>
+          <p:nvPr/>
+        </p:nvCxnSpPr>
+        <p:spPr>
+          <a:xfrm>
+            <a:off x="5161374" y="1449426"/>
+            <a:ext cx="736934" cy="0"/>
+          </a:xfrm>
+          <a:prstGeom prst="line">
+            <a:avLst/>
+          </a:prstGeom>
+          <a:noFill/>
+          <a:ln w="101600">
+            <a:solidFill>
+              <a:srgbClr val="00B0F0">
+                <a:alpha val="30000"/>
+              </a:srgbClr>
+            </a:solidFill>
+          </a:ln>
+        </p:spPr>
+        <p:style>
+          <a:lnRef idx="2">
+            <a:schemeClr val="accent1">
+              <a:shade val="50000"/>
+            </a:schemeClr>
+          </a:lnRef>
+          <a:fillRef idx="1">
+            <a:schemeClr val="accent1"/>
+          </a:fillRef>
+          <a:effectRef idx="0">
+            <a:schemeClr val="accent1"/>
+          </a:effectRef>
+          <a:fontRef idx="minor">
+            <a:schemeClr val="lt1"/>
+          </a:fontRef>
+        </p:style>
+      </p:cxnSp>
+      <p:cxnSp>
+        <p:nvCxnSpPr>
+          <p:cNvPr id="11" name="直接连接符 10">
+            <a:extLst>
+              <a:ext uri="{FF2B5EF4-FFF2-40B4-BE49-F238E27FC236}">
+                <a16:creationId xmlns:a16="http://schemas.microsoft.com/office/drawing/2014/main" id="{9F8ACA82-2FC2-C78F-1BDE-4AD2102BFD71}"/>
+              </a:ext>
+            </a:extLst>
+          </p:cNvPr>
+          <p:cNvCxnSpPr>
+            <a:cxnSpLocks/>
+          </p:cNvCxnSpPr>
+          <p:nvPr/>
+        </p:nvCxnSpPr>
+        <p:spPr>
+          <a:xfrm>
+            <a:off x="5148674" y="1772529"/>
+            <a:ext cx="736934" cy="0"/>
+          </a:xfrm>
+          <a:prstGeom prst="line">
+            <a:avLst/>
+          </a:prstGeom>
+          <a:noFill/>
+          <a:ln w="101600">
+            <a:solidFill>
+              <a:srgbClr val="92D050">
+                <a:alpha val="50000"/>
+              </a:srgbClr>
+            </a:solidFill>
+          </a:ln>
+        </p:spPr>
+        <p:style>
+          <a:lnRef idx="2">
+            <a:schemeClr val="accent1">
+              <a:shade val="50000"/>
+            </a:schemeClr>
+          </a:lnRef>
+          <a:fillRef idx="1">
+            <a:schemeClr val="accent1"/>
+          </a:fillRef>
+          <a:effectRef idx="0">
+            <a:schemeClr val="accent1"/>
+          </a:effectRef>
+          <a:fontRef idx="minor">
+            <a:schemeClr val="lt1"/>
+          </a:fontRef>
+        </p:style>
+      </p:cxnSp>
     </p:spTree>
     <p:extLst>
       <p:ext uri="{BB962C8B-B14F-4D97-AF65-F5344CB8AC3E}">
         <p14:creationId xmlns:p14="http://schemas.microsoft.com/office/powerpoint/2010/main" val="2489664853"/>
+      </p:ext>
+    </p:extLst>
+  </p:cSld>
+  <p:clrMapOvr>
+    <a:masterClrMapping/>
+  </p:clrMapOvr>
+</p:sld>
+</file>
+
+<file path=ppt/slides/slide2.xml><?xml version="1.0" encoding="utf-8"?>
+<p:sld xmlns:a="http://schemas.openxmlformats.org/drawingml/2006/main" xmlns:r="http://schemas.openxmlformats.org/officeDocument/2006/relationships" xmlns:p="http://schemas.openxmlformats.org/presentationml/2006/main">
+  <p:cSld>
+    <p:spTree>
+      <p:nvGrpSpPr>
+        <p:cNvPr id="1" name=""/>
+        <p:cNvGrpSpPr/>
+        <p:nvPr/>
+      </p:nvGrpSpPr>
+      <p:grpSpPr>
+        <a:xfrm>
+          <a:off x="0" y="0"/>
+          <a:ext cx="0" cy="0"/>
+          <a:chOff x="0" y="0"/>
+          <a:chExt cx="0" cy="0"/>
+        </a:xfrm>
+      </p:grpSpPr>
+      <p:grpSp>
+        <p:nvGrpSpPr>
+          <p:cNvPr id="26" name="组合 25">
+            <a:extLst>
+              <a:ext uri="{FF2B5EF4-FFF2-40B4-BE49-F238E27FC236}">
+                <a16:creationId xmlns:a16="http://schemas.microsoft.com/office/drawing/2014/main" id="{37EA776D-A627-024B-A983-EC85736FB02E}"/>
+              </a:ext>
+            </a:extLst>
+          </p:cNvPr>
+          <p:cNvGrpSpPr/>
+          <p:nvPr/>
+        </p:nvGrpSpPr>
+        <p:grpSpPr>
+          <a:xfrm>
+            <a:off x="4754974" y="167476"/>
+            <a:ext cx="736934" cy="150903"/>
+            <a:chOff x="4754974" y="167476"/>
+            <a:chExt cx="736934" cy="150903"/>
+          </a:xfrm>
+        </p:grpSpPr>
+        <p:cxnSp>
+          <p:nvCxnSpPr>
+            <p:cNvPr id="24" name="直接连接符 23">
+              <a:extLst>
+                <a:ext uri="{FF2B5EF4-FFF2-40B4-BE49-F238E27FC236}">
+                  <a16:creationId xmlns:a16="http://schemas.microsoft.com/office/drawing/2014/main" id="{0A934D7B-6934-6445-E62E-C72D6E453525}"/>
+                </a:ext>
+              </a:extLst>
+            </p:cNvPr>
+            <p:cNvCxnSpPr>
+              <a:cxnSpLocks/>
+            </p:cNvCxnSpPr>
+            <p:nvPr/>
+          </p:nvCxnSpPr>
+          <p:spPr>
+            <a:xfrm>
+              <a:off x="4754974" y="167476"/>
+              <a:ext cx="736934" cy="0"/>
+            </a:xfrm>
+            <a:prstGeom prst="line">
+              <a:avLst/>
+            </a:prstGeom>
+            <a:noFill/>
+            <a:ln w="101600">
+              <a:solidFill>
+                <a:schemeClr val="accent2">
+                  <a:alpha val="50000"/>
+                </a:schemeClr>
+              </a:solidFill>
+            </a:ln>
+          </p:spPr>
+          <p:style>
+            <a:lnRef idx="2">
+              <a:schemeClr val="accent1">
+                <a:shade val="50000"/>
+              </a:schemeClr>
+            </a:lnRef>
+            <a:fillRef idx="1">
+              <a:schemeClr val="accent1"/>
+            </a:fillRef>
+            <a:effectRef idx="0">
+              <a:schemeClr val="accent1"/>
+            </a:effectRef>
+            <a:fontRef idx="minor">
+              <a:schemeClr val="lt1"/>
+            </a:fontRef>
+          </p:style>
+        </p:cxnSp>
+        <p:cxnSp>
+          <p:nvCxnSpPr>
+            <p:cNvPr id="25" name="直接连接符 24">
+              <a:extLst>
+                <a:ext uri="{FF2B5EF4-FFF2-40B4-BE49-F238E27FC236}">
+                  <a16:creationId xmlns:a16="http://schemas.microsoft.com/office/drawing/2014/main" id="{915E380F-27A7-E0C7-B2DC-491437F2A356}"/>
+                </a:ext>
+              </a:extLst>
+            </p:cNvPr>
+            <p:cNvCxnSpPr>
+              <a:cxnSpLocks/>
+            </p:cNvCxnSpPr>
+            <p:nvPr/>
+          </p:nvCxnSpPr>
+          <p:spPr>
+            <a:xfrm>
+              <a:off x="4754974" y="318379"/>
+              <a:ext cx="736934" cy="0"/>
+            </a:xfrm>
+            <a:prstGeom prst="line">
+              <a:avLst/>
+            </a:prstGeom>
+            <a:noFill/>
+            <a:ln w="101600">
+              <a:solidFill>
+                <a:srgbClr val="00B0F0">
+                  <a:alpha val="30000"/>
+                </a:srgbClr>
+              </a:solidFill>
+            </a:ln>
+          </p:spPr>
+          <p:style>
+            <a:lnRef idx="2">
+              <a:schemeClr val="accent1">
+                <a:shade val="50000"/>
+              </a:schemeClr>
+            </a:lnRef>
+            <a:fillRef idx="1">
+              <a:schemeClr val="accent1"/>
+            </a:fillRef>
+            <a:effectRef idx="0">
+              <a:schemeClr val="accent1"/>
+            </a:effectRef>
+            <a:fontRef idx="minor">
+              <a:schemeClr val="lt1"/>
+            </a:fontRef>
+          </p:style>
+        </p:cxnSp>
+      </p:grpSp>
+      <p:cxnSp>
+        <p:nvCxnSpPr>
+          <p:cNvPr id="28" name="直接连接符 27">
+            <a:extLst>
+              <a:ext uri="{FF2B5EF4-FFF2-40B4-BE49-F238E27FC236}">
+                <a16:creationId xmlns:a16="http://schemas.microsoft.com/office/drawing/2014/main" id="{323911B4-E207-0566-CDD2-1FCB58179389}"/>
+              </a:ext>
+            </a:extLst>
+          </p:cNvPr>
+          <p:cNvCxnSpPr>
+            <a:cxnSpLocks/>
+          </p:cNvCxnSpPr>
+          <p:nvPr/>
+        </p:nvCxnSpPr>
+        <p:spPr>
+          <a:xfrm>
+            <a:off x="4634324" y="1589876"/>
+            <a:ext cx="736934" cy="0"/>
+          </a:xfrm>
+          <a:prstGeom prst="line">
+            <a:avLst/>
+          </a:prstGeom>
+          <a:noFill/>
+          <a:ln w="101600">
+            <a:solidFill>
+              <a:schemeClr val="accent2">
+                <a:alpha val="50000"/>
+              </a:schemeClr>
+            </a:solidFill>
+          </a:ln>
+        </p:spPr>
+        <p:style>
+          <a:lnRef idx="2">
+            <a:schemeClr val="accent1">
+              <a:shade val="50000"/>
+            </a:schemeClr>
+          </a:lnRef>
+          <a:fillRef idx="1">
+            <a:schemeClr val="accent1"/>
+          </a:fillRef>
+          <a:effectRef idx="0">
+            <a:schemeClr val="accent1"/>
+          </a:effectRef>
+          <a:fontRef idx="minor">
+            <a:schemeClr val="lt1"/>
+          </a:fontRef>
+        </p:style>
+      </p:cxnSp>
+      <p:cxnSp>
+        <p:nvCxnSpPr>
+          <p:cNvPr id="29" name="直接连接符 28">
+            <a:extLst>
+              <a:ext uri="{FF2B5EF4-FFF2-40B4-BE49-F238E27FC236}">
+                <a16:creationId xmlns:a16="http://schemas.microsoft.com/office/drawing/2014/main" id="{A04A83B1-020D-B0D6-E202-56100EFD0341}"/>
+              </a:ext>
+            </a:extLst>
+          </p:cNvPr>
+          <p:cNvCxnSpPr>
+            <a:cxnSpLocks/>
+          </p:cNvCxnSpPr>
+          <p:nvPr/>
+        </p:nvCxnSpPr>
+        <p:spPr>
+          <a:xfrm>
+            <a:off x="4634324" y="2032879"/>
+            <a:ext cx="736934" cy="0"/>
+          </a:xfrm>
+          <a:prstGeom prst="line">
+            <a:avLst/>
+          </a:prstGeom>
+          <a:noFill/>
+          <a:ln w="101600">
+            <a:solidFill>
+              <a:srgbClr val="00B0F0">
+                <a:alpha val="30000"/>
+              </a:srgbClr>
+            </a:solidFill>
+          </a:ln>
+        </p:spPr>
+        <p:style>
+          <a:lnRef idx="2">
+            <a:schemeClr val="accent1">
+              <a:shade val="50000"/>
+            </a:schemeClr>
+          </a:lnRef>
+          <a:fillRef idx="1">
+            <a:schemeClr val="accent1"/>
+          </a:fillRef>
+          <a:effectRef idx="0">
+            <a:schemeClr val="accent1"/>
+          </a:effectRef>
+          <a:fontRef idx="minor">
+            <a:schemeClr val="lt1"/>
+          </a:fontRef>
+        </p:style>
+      </p:cxnSp>
+      <p:cxnSp>
+        <p:nvCxnSpPr>
+          <p:cNvPr id="30" name="直接连接符 29">
+            <a:extLst>
+              <a:ext uri="{FF2B5EF4-FFF2-40B4-BE49-F238E27FC236}">
+                <a16:creationId xmlns:a16="http://schemas.microsoft.com/office/drawing/2014/main" id="{E8792DE9-8668-3CC3-6E29-15DDBB16CB48}"/>
+              </a:ext>
+            </a:extLst>
+          </p:cNvPr>
+          <p:cNvCxnSpPr>
+            <a:cxnSpLocks/>
+          </p:cNvCxnSpPr>
+          <p:nvPr/>
+        </p:nvCxnSpPr>
+        <p:spPr>
+          <a:xfrm>
+            <a:off x="4634324" y="3082126"/>
+            <a:ext cx="736934" cy="0"/>
+          </a:xfrm>
+          <a:prstGeom prst="line">
+            <a:avLst/>
+          </a:prstGeom>
+          <a:noFill/>
+          <a:ln w="101600">
+            <a:solidFill>
+              <a:schemeClr val="accent2">
+                <a:alpha val="50000"/>
+              </a:schemeClr>
+            </a:solidFill>
+          </a:ln>
+        </p:spPr>
+        <p:style>
+          <a:lnRef idx="2">
+            <a:schemeClr val="accent1">
+              <a:shade val="50000"/>
+            </a:schemeClr>
+          </a:lnRef>
+          <a:fillRef idx="1">
+            <a:schemeClr val="accent1"/>
+          </a:fillRef>
+          <a:effectRef idx="0">
+            <a:schemeClr val="accent1"/>
+          </a:effectRef>
+          <a:fontRef idx="minor">
+            <a:schemeClr val="lt1"/>
+          </a:fontRef>
+        </p:style>
+      </p:cxnSp>
+      <p:cxnSp>
+        <p:nvCxnSpPr>
+          <p:cNvPr id="31" name="直接连接符 30">
+            <a:extLst>
+              <a:ext uri="{FF2B5EF4-FFF2-40B4-BE49-F238E27FC236}">
+                <a16:creationId xmlns:a16="http://schemas.microsoft.com/office/drawing/2014/main" id="{C0F885D2-4AEA-B9BB-ED07-888391E2BC3F}"/>
+              </a:ext>
+            </a:extLst>
+          </p:cNvPr>
+          <p:cNvCxnSpPr>
+            <a:cxnSpLocks/>
+          </p:cNvCxnSpPr>
+          <p:nvPr/>
+        </p:nvCxnSpPr>
+        <p:spPr>
+          <a:xfrm>
+            <a:off x="4634324" y="3220329"/>
+            <a:ext cx="736934" cy="0"/>
+          </a:xfrm>
+          <a:prstGeom prst="line">
+            <a:avLst/>
+          </a:prstGeom>
+          <a:noFill/>
+          <a:ln w="101600">
+            <a:solidFill>
+              <a:srgbClr val="00B0F0">
+                <a:alpha val="30000"/>
+              </a:srgbClr>
+            </a:solidFill>
+          </a:ln>
+        </p:spPr>
+        <p:style>
+          <a:lnRef idx="2">
+            <a:schemeClr val="accent1">
+              <a:shade val="50000"/>
+            </a:schemeClr>
+          </a:lnRef>
+          <a:fillRef idx="1">
+            <a:schemeClr val="accent1"/>
+          </a:fillRef>
+          <a:effectRef idx="0">
+            <a:schemeClr val="accent1"/>
+          </a:effectRef>
+          <a:fontRef idx="minor">
+            <a:schemeClr val="lt1"/>
+          </a:fontRef>
+        </p:style>
+      </p:cxnSp>
+      <p:cxnSp>
+        <p:nvCxnSpPr>
+          <p:cNvPr id="32" name="直接连接符 31">
+            <a:extLst>
+              <a:ext uri="{FF2B5EF4-FFF2-40B4-BE49-F238E27FC236}">
+                <a16:creationId xmlns:a16="http://schemas.microsoft.com/office/drawing/2014/main" id="{53D676A0-2724-A167-87A9-2B73B81B5E42}"/>
+              </a:ext>
+            </a:extLst>
+          </p:cNvPr>
+          <p:cNvCxnSpPr>
+            <a:cxnSpLocks/>
+          </p:cNvCxnSpPr>
+          <p:nvPr/>
+        </p:nvCxnSpPr>
+        <p:spPr>
+          <a:xfrm>
+            <a:off x="4634324" y="4599776"/>
+            <a:ext cx="736934" cy="0"/>
+          </a:xfrm>
+          <a:prstGeom prst="line">
+            <a:avLst/>
+          </a:prstGeom>
+          <a:noFill/>
+          <a:ln w="101600">
+            <a:solidFill>
+              <a:schemeClr val="accent2">
+                <a:alpha val="50000"/>
+              </a:schemeClr>
+            </a:solidFill>
+          </a:ln>
+        </p:spPr>
+        <p:style>
+          <a:lnRef idx="2">
+            <a:schemeClr val="accent1">
+              <a:shade val="50000"/>
+            </a:schemeClr>
+          </a:lnRef>
+          <a:fillRef idx="1">
+            <a:schemeClr val="accent1"/>
+          </a:fillRef>
+          <a:effectRef idx="0">
+            <a:schemeClr val="accent1"/>
+          </a:effectRef>
+          <a:fontRef idx="minor">
+            <a:schemeClr val="lt1"/>
+          </a:fontRef>
+        </p:style>
+      </p:cxnSp>
+      <p:cxnSp>
+        <p:nvCxnSpPr>
+          <p:cNvPr id="33" name="直接连接符 32">
+            <a:extLst>
+              <a:ext uri="{FF2B5EF4-FFF2-40B4-BE49-F238E27FC236}">
+                <a16:creationId xmlns:a16="http://schemas.microsoft.com/office/drawing/2014/main" id="{A7EFAC11-7FDC-5F21-9173-F88DE0C3C943}"/>
+              </a:ext>
+            </a:extLst>
+          </p:cNvPr>
+          <p:cNvCxnSpPr>
+            <a:cxnSpLocks/>
+          </p:cNvCxnSpPr>
+          <p:nvPr/>
+        </p:nvCxnSpPr>
+        <p:spPr>
+          <a:xfrm>
+            <a:off x="4634324" y="4744329"/>
+            <a:ext cx="736934" cy="0"/>
+          </a:xfrm>
+          <a:prstGeom prst="line">
+            <a:avLst/>
+          </a:prstGeom>
+          <a:noFill/>
+          <a:ln w="101600">
+            <a:solidFill>
+              <a:srgbClr val="00B0F0">
+                <a:alpha val="30000"/>
+              </a:srgbClr>
+            </a:solidFill>
+          </a:ln>
+        </p:spPr>
+        <p:style>
+          <a:lnRef idx="2">
+            <a:schemeClr val="accent1">
+              <a:shade val="50000"/>
+            </a:schemeClr>
+          </a:lnRef>
+          <a:fillRef idx="1">
+            <a:schemeClr val="accent1"/>
+          </a:fillRef>
+          <a:effectRef idx="0">
+            <a:schemeClr val="accent1"/>
+          </a:effectRef>
+          <a:fontRef idx="minor">
+            <a:schemeClr val="lt1"/>
+          </a:fontRef>
+        </p:style>
+      </p:cxnSp>
+      <p:sp>
+        <p:nvSpPr>
+          <p:cNvPr id="34" name="直角三角形 33">
+            <a:extLst>
+              <a:ext uri="{FF2B5EF4-FFF2-40B4-BE49-F238E27FC236}">
+                <a16:creationId xmlns:a16="http://schemas.microsoft.com/office/drawing/2014/main" id="{6B4CD273-4EA4-12D4-5E84-9FD46B4291BF}"/>
+              </a:ext>
+            </a:extLst>
+          </p:cNvPr>
+          <p:cNvSpPr/>
+          <p:nvPr/>
+        </p:nvSpPr>
+        <p:spPr>
+          <a:xfrm rot="10800000">
+            <a:off x="4711700" y="5852223"/>
+            <a:ext cx="672258" cy="672258"/>
+          </a:xfrm>
+          <a:prstGeom prst="rtTriangle">
+            <a:avLst/>
+          </a:prstGeom>
+          <a:noFill/>
+          <a:ln w="101600">
+            <a:solidFill>
+              <a:srgbClr val="00B0F0">
+                <a:alpha val="30000"/>
+              </a:srgbClr>
+            </a:solidFill>
+          </a:ln>
+        </p:spPr>
+        <p:style>
+          <a:lnRef idx="2">
+            <a:schemeClr val="accent1">
+              <a:shade val="50000"/>
+            </a:schemeClr>
+          </a:lnRef>
+          <a:fillRef idx="1">
+            <a:schemeClr val="accent1"/>
+          </a:fillRef>
+          <a:effectRef idx="0">
+            <a:schemeClr val="accent1"/>
+          </a:effectRef>
+          <a:fontRef idx="minor">
+            <a:schemeClr val="lt1"/>
+          </a:fontRef>
+        </p:style>
+        <p:txBody>
+          <a:bodyPr rtlCol="0" anchor="ctr"/>
+          <a:lstStyle/>
+          <a:p>
+            <a:pPr algn="ctr"/>
+            <a:endParaRPr lang="zh-CN" altLang="en-US"/>
+          </a:p>
+        </p:txBody>
+      </p:sp>
+      <p:pic>
+        <p:nvPicPr>
+          <p:cNvPr id="23" name="图片 22">
+            <a:extLst>
+              <a:ext uri="{FF2B5EF4-FFF2-40B4-BE49-F238E27FC236}">
+                <a16:creationId xmlns:a16="http://schemas.microsoft.com/office/drawing/2014/main" id="{E7E0294F-18C6-11AF-13ED-024ED6B893B0}"/>
+              </a:ext>
+            </a:extLst>
+          </p:cNvPr>
+          <p:cNvPicPr>
+            <a:picLocks noChangeAspect="1"/>
+          </p:cNvPicPr>
+          <p:nvPr/>
+        </p:nvPicPr>
+        <p:blipFill>
+          <a:blip r:embed="rId2">
+            <a:extLst>
+              <a:ext uri="{28A0092B-C50C-407E-A947-70E740481C1C}">
+                <a14:useLocalDpi xmlns:a14="http://schemas.microsoft.com/office/drawing/2010/main" val="0"/>
+              </a:ext>
+            </a:extLst>
+          </a:blip>
+          <a:stretch>
+            <a:fillRect/>
+          </a:stretch>
+        </p:blipFill>
+        <p:spPr>
+          <a:xfrm>
+            <a:off x="4415563" y="0"/>
+            <a:ext cx="3360874" cy="6858000"/>
+          </a:xfrm>
+          <a:prstGeom prst="rect">
+            <a:avLst/>
+          </a:prstGeom>
+        </p:spPr>
+      </p:pic>
+      <p:sp>
+        <p:nvSpPr>
+          <p:cNvPr id="35" name="椭圆 34">
+            <a:extLst>
+              <a:ext uri="{FF2B5EF4-FFF2-40B4-BE49-F238E27FC236}">
+                <a16:creationId xmlns:a16="http://schemas.microsoft.com/office/drawing/2014/main" id="{8E1DA7CC-E6CF-5FF9-5A46-28DB859A5924}"/>
+              </a:ext>
+            </a:extLst>
+          </p:cNvPr>
+          <p:cNvSpPr/>
+          <p:nvPr/>
+        </p:nvSpPr>
+        <p:spPr>
+          <a:xfrm>
+            <a:off x="4767674" y="241443"/>
+            <a:ext cx="146050" cy="146050"/>
+          </a:xfrm>
+          <a:prstGeom prst="ellipse">
+            <a:avLst/>
+          </a:prstGeom>
+          <a:noFill/>
+          <a:ln>
+            <a:solidFill>
+              <a:srgbClr val="C00000"/>
+            </a:solidFill>
+          </a:ln>
+        </p:spPr>
+        <p:style>
+          <a:lnRef idx="2">
+            <a:schemeClr val="accent1">
+              <a:shade val="50000"/>
+            </a:schemeClr>
+          </a:lnRef>
+          <a:fillRef idx="1">
+            <a:schemeClr val="accent1"/>
+          </a:fillRef>
+          <a:effectRef idx="0">
+            <a:schemeClr val="accent1"/>
+          </a:effectRef>
+          <a:fontRef idx="minor">
+            <a:schemeClr val="lt1"/>
+          </a:fontRef>
+        </p:style>
+        <p:txBody>
+          <a:bodyPr rtlCol="0" anchor="ctr"/>
+          <a:lstStyle/>
+          <a:p>
+            <a:pPr algn="ctr"/>
+            <a:endParaRPr lang="zh-CN" altLang="en-US"/>
+          </a:p>
+        </p:txBody>
+      </p:sp>
+      <p:sp>
+        <p:nvSpPr>
+          <p:cNvPr id="36" name="椭圆 35">
+            <a:extLst>
+              <a:ext uri="{FF2B5EF4-FFF2-40B4-BE49-F238E27FC236}">
+                <a16:creationId xmlns:a16="http://schemas.microsoft.com/office/drawing/2014/main" id="{978E3FEE-0372-B61A-2DD4-400366B6DDF4}"/>
+              </a:ext>
+            </a:extLst>
+          </p:cNvPr>
+          <p:cNvSpPr/>
+          <p:nvPr/>
+        </p:nvSpPr>
+        <p:spPr>
+          <a:xfrm>
+            <a:off x="4652365" y="1959854"/>
+            <a:ext cx="146050" cy="146050"/>
+          </a:xfrm>
+          <a:prstGeom prst="ellipse">
+            <a:avLst/>
+          </a:prstGeom>
+          <a:noFill/>
+          <a:ln>
+            <a:solidFill>
+              <a:srgbClr val="C00000"/>
+            </a:solidFill>
+          </a:ln>
+        </p:spPr>
+        <p:style>
+          <a:lnRef idx="2">
+            <a:schemeClr val="accent1">
+              <a:shade val="50000"/>
+            </a:schemeClr>
+          </a:lnRef>
+          <a:fillRef idx="1">
+            <a:schemeClr val="accent1"/>
+          </a:fillRef>
+          <a:effectRef idx="0">
+            <a:schemeClr val="accent1"/>
+          </a:effectRef>
+          <a:fontRef idx="minor">
+            <a:schemeClr val="lt1"/>
+          </a:fontRef>
+        </p:style>
+        <p:txBody>
+          <a:bodyPr rtlCol="0" anchor="ctr"/>
+          <a:lstStyle/>
+          <a:p>
+            <a:pPr algn="ctr"/>
+            <a:endParaRPr lang="zh-CN" altLang="en-US"/>
+          </a:p>
+        </p:txBody>
+      </p:sp>
+      <p:sp>
+        <p:nvSpPr>
+          <p:cNvPr id="37" name="椭圆 36">
+            <a:extLst>
+              <a:ext uri="{FF2B5EF4-FFF2-40B4-BE49-F238E27FC236}">
+                <a16:creationId xmlns:a16="http://schemas.microsoft.com/office/drawing/2014/main" id="{C12F0C6E-433B-034F-26E1-699EF3E9262D}"/>
+              </a:ext>
+            </a:extLst>
+          </p:cNvPr>
+          <p:cNvSpPr/>
+          <p:nvPr/>
+        </p:nvSpPr>
+        <p:spPr>
+          <a:xfrm>
+            <a:off x="4811115" y="3140773"/>
+            <a:ext cx="146050" cy="146050"/>
+          </a:xfrm>
+          <a:prstGeom prst="ellipse">
+            <a:avLst/>
+          </a:prstGeom>
+          <a:noFill/>
+          <a:ln>
+            <a:solidFill>
+              <a:srgbClr val="C00000"/>
+            </a:solidFill>
+          </a:ln>
+        </p:spPr>
+        <p:style>
+          <a:lnRef idx="2">
+            <a:schemeClr val="accent1">
+              <a:shade val="50000"/>
+            </a:schemeClr>
+          </a:lnRef>
+          <a:fillRef idx="1">
+            <a:schemeClr val="accent1"/>
+          </a:fillRef>
+          <a:effectRef idx="0">
+            <a:schemeClr val="accent1"/>
+          </a:effectRef>
+          <a:fontRef idx="minor">
+            <a:schemeClr val="lt1"/>
+          </a:fontRef>
+        </p:style>
+        <p:txBody>
+          <a:bodyPr rtlCol="0" anchor="ctr"/>
+          <a:lstStyle/>
+          <a:p>
+            <a:pPr algn="ctr"/>
+            <a:endParaRPr lang="zh-CN" altLang="en-US"/>
+          </a:p>
+        </p:txBody>
+      </p:sp>
+      <p:sp>
+        <p:nvSpPr>
+          <p:cNvPr id="38" name="椭圆 37">
+            <a:extLst>
+              <a:ext uri="{FF2B5EF4-FFF2-40B4-BE49-F238E27FC236}">
+                <a16:creationId xmlns:a16="http://schemas.microsoft.com/office/drawing/2014/main" id="{86649542-791F-9147-F2D6-D65A4081903A}"/>
+              </a:ext>
+            </a:extLst>
+          </p:cNvPr>
+          <p:cNvSpPr/>
+          <p:nvPr/>
+        </p:nvSpPr>
+        <p:spPr>
+          <a:xfrm>
+            <a:off x="5008719" y="4671304"/>
+            <a:ext cx="146050" cy="146050"/>
+          </a:xfrm>
+          <a:prstGeom prst="ellipse">
+            <a:avLst/>
+          </a:prstGeom>
+          <a:noFill/>
+          <a:ln>
+            <a:solidFill>
+              <a:srgbClr val="C00000"/>
+            </a:solidFill>
+          </a:ln>
+        </p:spPr>
+        <p:style>
+          <a:lnRef idx="2">
+            <a:schemeClr val="accent1">
+              <a:shade val="50000"/>
+            </a:schemeClr>
+          </a:lnRef>
+          <a:fillRef idx="1">
+            <a:schemeClr val="accent1"/>
+          </a:fillRef>
+          <a:effectRef idx="0">
+            <a:schemeClr val="accent1"/>
+          </a:effectRef>
+          <a:fontRef idx="minor">
+            <a:schemeClr val="lt1"/>
+          </a:fontRef>
+        </p:style>
+        <p:txBody>
+          <a:bodyPr rtlCol="0" anchor="ctr"/>
+          <a:lstStyle/>
+          <a:p>
+            <a:pPr algn="ctr"/>
+            <a:endParaRPr lang="zh-CN" altLang="en-US"/>
+          </a:p>
+        </p:txBody>
+      </p:sp>
+    </p:spTree>
+    <p:extLst>
+      <p:ext uri="{BB962C8B-B14F-4D97-AF65-F5344CB8AC3E}">
+        <p14:creationId xmlns:p14="http://schemas.microsoft.com/office/powerpoint/2010/main" val="1334489036"/>
       </p:ext>
     </p:extLst>
   </p:cSld>

--- a/+100_latex_all_math_sel/mathLatex_线性代数/img/线性代数演示.pptx
+++ b/+100_latex_all_math_sel/mathLatex_线性代数/img/线性代数演示.pptx
@@ -7,6 +7,7 @@
   <p:sldIdLst>
     <p:sldId id="256" r:id="rId2"/>
     <p:sldId id="257" r:id="rId3"/>
+    <p:sldId id="258" r:id="rId4"/>
   </p:sldIdLst>
   <p:sldSz cx="12192000" cy="6858000"/>
   <p:notesSz cx="6858000" cy="9144000"/>
@@ -260,7 +261,7 @@
           <a:p>
             <a:fld id="{0BAD5452-5809-4E26-953E-7653194D16BD}" type="datetimeFigureOut">
               <a:rPr lang="zh-CN" altLang="en-US" smtClean="0"/>
-              <a:t>2023/3/20</a:t>
+              <a:t>2023/3/21</a:t>
             </a:fld>
             <a:endParaRPr lang="zh-CN" altLang="en-US"/>
           </a:p>
@@ -458,7 +459,7 @@
           <a:p>
             <a:fld id="{0BAD5452-5809-4E26-953E-7653194D16BD}" type="datetimeFigureOut">
               <a:rPr lang="zh-CN" altLang="en-US" smtClean="0"/>
-              <a:t>2023/3/20</a:t>
+              <a:t>2023/3/21</a:t>
             </a:fld>
             <a:endParaRPr lang="zh-CN" altLang="en-US"/>
           </a:p>
@@ -666,7 +667,7 @@
           <a:p>
             <a:fld id="{0BAD5452-5809-4E26-953E-7653194D16BD}" type="datetimeFigureOut">
               <a:rPr lang="zh-CN" altLang="en-US" smtClean="0"/>
-              <a:t>2023/3/20</a:t>
+              <a:t>2023/3/21</a:t>
             </a:fld>
             <a:endParaRPr lang="zh-CN" altLang="en-US"/>
           </a:p>
@@ -864,7 +865,7 @@
           <a:p>
             <a:fld id="{0BAD5452-5809-4E26-953E-7653194D16BD}" type="datetimeFigureOut">
               <a:rPr lang="zh-CN" altLang="en-US" smtClean="0"/>
-              <a:t>2023/3/20</a:t>
+              <a:t>2023/3/21</a:t>
             </a:fld>
             <a:endParaRPr lang="zh-CN" altLang="en-US"/>
           </a:p>
@@ -1139,7 +1140,7 @@
           <a:p>
             <a:fld id="{0BAD5452-5809-4E26-953E-7653194D16BD}" type="datetimeFigureOut">
               <a:rPr lang="zh-CN" altLang="en-US" smtClean="0"/>
-              <a:t>2023/3/20</a:t>
+              <a:t>2023/3/21</a:t>
             </a:fld>
             <a:endParaRPr lang="zh-CN" altLang="en-US"/>
           </a:p>
@@ -1404,7 +1405,7 @@
           <a:p>
             <a:fld id="{0BAD5452-5809-4E26-953E-7653194D16BD}" type="datetimeFigureOut">
               <a:rPr lang="zh-CN" altLang="en-US" smtClean="0"/>
-              <a:t>2023/3/20</a:t>
+              <a:t>2023/3/21</a:t>
             </a:fld>
             <a:endParaRPr lang="zh-CN" altLang="en-US"/>
           </a:p>
@@ -1816,7 +1817,7 @@
           <a:p>
             <a:fld id="{0BAD5452-5809-4E26-953E-7653194D16BD}" type="datetimeFigureOut">
               <a:rPr lang="zh-CN" altLang="en-US" smtClean="0"/>
-              <a:t>2023/3/20</a:t>
+              <a:t>2023/3/21</a:t>
             </a:fld>
             <a:endParaRPr lang="zh-CN" altLang="en-US"/>
           </a:p>
@@ -1957,7 +1958,7 @@
           <a:p>
             <a:fld id="{0BAD5452-5809-4E26-953E-7653194D16BD}" type="datetimeFigureOut">
               <a:rPr lang="zh-CN" altLang="en-US" smtClean="0"/>
-              <a:t>2023/3/20</a:t>
+              <a:t>2023/3/21</a:t>
             </a:fld>
             <a:endParaRPr lang="zh-CN" altLang="en-US"/>
           </a:p>
@@ -2070,7 +2071,7 @@
           <a:p>
             <a:fld id="{0BAD5452-5809-4E26-953E-7653194D16BD}" type="datetimeFigureOut">
               <a:rPr lang="zh-CN" altLang="en-US" smtClean="0"/>
-              <a:t>2023/3/20</a:t>
+              <a:t>2023/3/21</a:t>
             </a:fld>
             <a:endParaRPr lang="zh-CN" altLang="en-US"/>
           </a:p>
@@ -2381,7 +2382,7 @@
           <a:p>
             <a:fld id="{0BAD5452-5809-4E26-953E-7653194D16BD}" type="datetimeFigureOut">
               <a:rPr lang="zh-CN" altLang="en-US" smtClean="0"/>
-              <a:t>2023/3/20</a:t>
+              <a:t>2023/3/21</a:t>
             </a:fld>
             <a:endParaRPr lang="zh-CN" altLang="en-US"/>
           </a:p>
@@ -2669,7 +2670,7 @@
           <a:p>
             <a:fld id="{0BAD5452-5809-4E26-953E-7653194D16BD}" type="datetimeFigureOut">
               <a:rPr lang="zh-CN" altLang="en-US" smtClean="0"/>
-              <a:t>2023/3/20</a:t>
+              <a:t>2023/3/21</a:t>
             </a:fld>
             <a:endParaRPr lang="zh-CN" altLang="en-US"/>
           </a:p>
@@ -2910,7 +2911,7 @@
           <a:p>
             <a:fld id="{0BAD5452-5809-4E26-953E-7653194D16BD}" type="datetimeFigureOut">
               <a:rPr lang="zh-CN" altLang="en-US" smtClean="0"/>
-              <a:t>2023/3/20</a:t>
+              <a:t>2023/3/21</a:t>
             </a:fld>
             <a:endParaRPr lang="zh-CN" altLang="en-US"/>
           </a:p>
@@ -5493,6 +5494,888 @@
 </p:sld>
 </file>
 
+<file path=ppt/slides/slide3.xml><?xml version="1.0" encoding="utf-8"?>
+<p:sld xmlns:a="http://schemas.openxmlformats.org/drawingml/2006/main" xmlns:r="http://schemas.openxmlformats.org/officeDocument/2006/relationships" xmlns:p="http://schemas.openxmlformats.org/presentationml/2006/main">
+  <p:cSld>
+    <p:spTree>
+      <p:nvGrpSpPr>
+        <p:cNvPr id="1" name=""/>
+        <p:cNvGrpSpPr/>
+        <p:nvPr/>
+      </p:nvGrpSpPr>
+      <p:grpSpPr>
+        <a:xfrm>
+          <a:off x="0" y="0"/>
+          <a:ext cx="0" cy="0"/>
+          <a:chOff x="0" y="0"/>
+          <a:chExt cx="0" cy="0"/>
+        </a:xfrm>
+      </p:grpSpPr>
+      <p:cxnSp>
+        <p:nvCxnSpPr>
+          <p:cNvPr id="4" name="直接连接符 3">
+            <a:extLst>
+              <a:ext uri="{FF2B5EF4-FFF2-40B4-BE49-F238E27FC236}">
+                <a16:creationId xmlns:a16="http://schemas.microsoft.com/office/drawing/2014/main" id="{CB122D39-177F-C27C-6832-497FB48E8A13}"/>
+              </a:ext>
+            </a:extLst>
+          </p:cNvPr>
+          <p:cNvCxnSpPr>
+            <a:cxnSpLocks/>
+          </p:cNvCxnSpPr>
+          <p:nvPr/>
+        </p:nvCxnSpPr>
+        <p:spPr>
+          <a:xfrm>
+            <a:off x="5157788" y="3414710"/>
+            <a:ext cx="581025" cy="0"/>
+          </a:xfrm>
+          <a:prstGeom prst="line">
+            <a:avLst/>
+          </a:prstGeom>
+          <a:noFill/>
+          <a:ln w="101600">
+            <a:solidFill>
+              <a:schemeClr val="accent2">
+                <a:alpha val="50000"/>
+              </a:schemeClr>
+            </a:solidFill>
+          </a:ln>
+        </p:spPr>
+        <p:style>
+          <a:lnRef idx="2">
+            <a:schemeClr val="accent1">
+              <a:shade val="50000"/>
+            </a:schemeClr>
+          </a:lnRef>
+          <a:fillRef idx="1">
+            <a:schemeClr val="accent1"/>
+          </a:fillRef>
+          <a:effectRef idx="0">
+            <a:schemeClr val="accent1"/>
+          </a:effectRef>
+          <a:fontRef idx="minor">
+            <a:schemeClr val="lt1"/>
+          </a:fontRef>
+        </p:style>
+      </p:cxnSp>
+      <p:cxnSp>
+        <p:nvCxnSpPr>
+          <p:cNvPr id="5" name="直接连接符 4">
+            <a:extLst>
+              <a:ext uri="{FF2B5EF4-FFF2-40B4-BE49-F238E27FC236}">
+                <a16:creationId xmlns:a16="http://schemas.microsoft.com/office/drawing/2014/main" id="{84D43D31-F4E5-174D-1F52-27388BE76471}"/>
+              </a:ext>
+            </a:extLst>
+          </p:cNvPr>
+          <p:cNvCxnSpPr>
+            <a:cxnSpLocks/>
+          </p:cNvCxnSpPr>
+          <p:nvPr/>
+        </p:nvCxnSpPr>
+        <p:spPr>
+          <a:xfrm>
+            <a:off x="5364498" y="3022600"/>
+            <a:ext cx="0" cy="606425"/>
+          </a:xfrm>
+          <a:prstGeom prst="line">
+            <a:avLst/>
+          </a:prstGeom>
+          <a:noFill/>
+          <a:ln w="101600">
+            <a:solidFill>
+              <a:srgbClr val="00B0F0">
+                <a:alpha val="30000"/>
+              </a:srgbClr>
+            </a:solidFill>
+          </a:ln>
+        </p:spPr>
+        <p:style>
+          <a:lnRef idx="2">
+            <a:schemeClr val="accent1">
+              <a:shade val="50000"/>
+            </a:schemeClr>
+          </a:lnRef>
+          <a:fillRef idx="1">
+            <a:schemeClr val="accent1"/>
+          </a:fillRef>
+          <a:effectRef idx="0">
+            <a:schemeClr val="accent1"/>
+          </a:effectRef>
+          <a:fontRef idx="minor">
+            <a:schemeClr val="lt1"/>
+          </a:fontRef>
+        </p:style>
+      </p:cxnSp>
+      <p:sp>
+        <p:nvSpPr>
+          <p:cNvPr id="6" name="椭圆 5">
+            <a:extLst>
+              <a:ext uri="{FF2B5EF4-FFF2-40B4-BE49-F238E27FC236}">
+                <a16:creationId xmlns:a16="http://schemas.microsoft.com/office/drawing/2014/main" id="{B709D15A-7AEF-E6C9-86F7-0D25529EB675}"/>
+              </a:ext>
+            </a:extLst>
+          </p:cNvPr>
+          <p:cNvSpPr/>
+          <p:nvPr/>
+        </p:nvSpPr>
+        <p:spPr>
+          <a:xfrm>
+            <a:off x="5291473" y="3341685"/>
+            <a:ext cx="146050" cy="146050"/>
+          </a:xfrm>
+          <a:prstGeom prst="ellipse">
+            <a:avLst/>
+          </a:prstGeom>
+          <a:noFill/>
+          <a:ln>
+            <a:solidFill>
+              <a:srgbClr val="C00000"/>
+            </a:solidFill>
+          </a:ln>
+        </p:spPr>
+        <p:style>
+          <a:lnRef idx="2">
+            <a:schemeClr val="accent1">
+              <a:shade val="50000"/>
+            </a:schemeClr>
+          </a:lnRef>
+          <a:fillRef idx="1">
+            <a:schemeClr val="accent1"/>
+          </a:fillRef>
+          <a:effectRef idx="0">
+            <a:schemeClr val="accent1"/>
+          </a:effectRef>
+          <a:fontRef idx="minor">
+            <a:schemeClr val="lt1"/>
+          </a:fontRef>
+        </p:style>
+        <p:txBody>
+          <a:bodyPr rtlCol="0" anchor="ctr"/>
+          <a:lstStyle/>
+          <a:p>
+            <a:pPr algn="ctr"/>
+            <a:endParaRPr lang="zh-CN" altLang="en-US"/>
+          </a:p>
+        </p:txBody>
+      </p:sp>
+      <p:sp>
+        <p:nvSpPr>
+          <p:cNvPr id="7" name="矩形 6">
+            <a:extLst>
+              <a:ext uri="{FF2B5EF4-FFF2-40B4-BE49-F238E27FC236}">
+                <a16:creationId xmlns:a16="http://schemas.microsoft.com/office/drawing/2014/main" id="{EFBC0CB7-93A2-0030-804B-E82F2D858CEB}"/>
+              </a:ext>
+            </a:extLst>
+          </p:cNvPr>
+          <p:cNvSpPr/>
+          <p:nvPr/>
+        </p:nvSpPr>
+        <p:spPr>
+          <a:xfrm>
+            <a:off x="5111124" y="3015455"/>
+            <a:ext cx="180975" cy="303212"/>
+          </a:xfrm>
+          <a:prstGeom prst="rect">
+            <a:avLst/>
+          </a:prstGeom>
+          <a:solidFill>
+            <a:srgbClr val="FFFF00"/>
+          </a:solidFill>
+          <a:ln>
+            <a:noFill/>
+          </a:ln>
+        </p:spPr>
+        <p:style>
+          <a:lnRef idx="2">
+            <a:schemeClr val="accent1">
+              <a:shade val="50000"/>
+            </a:schemeClr>
+          </a:lnRef>
+          <a:fillRef idx="1">
+            <a:schemeClr val="accent1"/>
+          </a:fillRef>
+          <a:effectRef idx="0">
+            <a:schemeClr val="accent1"/>
+          </a:effectRef>
+          <a:fontRef idx="minor">
+            <a:schemeClr val="lt1"/>
+          </a:fontRef>
+        </p:style>
+        <p:txBody>
+          <a:bodyPr rtlCol="0" anchor="ctr"/>
+          <a:lstStyle/>
+          <a:p>
+            <a:pPr algn="ctr"/>
+            <a:endParaRPr lang="zh-CN" altLang="en-US"/>
+          </a:p>
+        </p:txBody>
+      </p:sp>
+      <p:sp>
+        <p:nvSpPr>
+          <p:cNvPr id="8" name="矩形 7">
+            <a:extLst>
+              <a:ext uri="{FF2B5EF4-FFF2-40B4-BE49-F238E27FC236}">
+                <a16:creationId xmlns:a16="http://schemas.microsoft.com/office/drawing/2014/main" id="{DE8BB6DF-03A2-388D-8A05-776307CE0FE6}"/>
+              </a:ext>
+            </a:extLst>
+          </p:cNvPr>
+          <p:cNvSpPr/>
+          <p:nvPr/>
+        </p:nvSpPr>
+        <p:spPr>
+          <a:xfrm>
+            <a:off x="5480385" y="3015455"/>
+            <a:ext cx="258428" cy="303212"/>
+          </a:xfrm>
+          <a:prstGeom prst="rect">
+            <a:avLst/>
+          </a:prstGeom>
+          <a:solidFill>
+            <a:srgbClr val="FFFF00"/>
+          </a:solidFill>
+          <a:ln>
+            <a:noFill/>
+          </a:ln>
+        </p:spPr>
+        <p:style>
+          <a:lnRef idx="2">
+            <a:schemeClr val="accent1">
+              <a:shade val="50000"/>
+            </a:schemeClr>
+          </a:lnRef>
+          <a:fillRef idx="1">
+            <a:schemeClr val="accent1"/>
+          </a:fillRef>
+          <a:effectRef idx="0">
+            <a:schemeClr val="accent1"/>
+          </a:effectRef>
+          <a:fontRef idx="minor">
+            <a:schemeClr val="lt1"/>
+          </a:fontRef>
+        </p:style>
+        <p:txBody>
+          <a:bodyPr rtlCol="0" anchor="ctr"/>
+          <a:lstStyle/>
+          <a:p>
+            <a:pPr algn="ctr"/>
+            <a:endParaRPr lang="zh-CN" altLang="en-US"/>
+          </a:p>
+        </p:txBody>
+      </p:sp>
+      <p:sp>
+        <p:nvSpPr>
+          <p:cNvPr id="9" name="矩形 8">
+            <a:extLst>
+              <a:ext uri="{FF2B5EF4-FFF2-40B4-BE49-F238E27FC236}">
+                <a16:creationId xmlns:a16="http://schemas.microsoft.com/office/drawing/2014/main" id="{B72A7271-DBB9-F9A7-74C9-A693A832328C}"/>
+              </a:ext>
+            </a:extLst>
+          </p:cNvPr>
+          <p:cNvSpPr/>
+          <p:nvPr/>
+        </p:nvSpPr>
+        <p:spPr>
+          <a:xfrm>
+            <a:off x="5111124" y="3487735"/>
+            <a:ext cx="180975" cy="141288"/>
+          </a:xfrm>
+          <a:prstGeom prst="rect">
+            <a:avLst/>
+          </a:prstGeom>
+          <a:solidFill>
+            <a:srgbClr val="FFFF00"/>
+          </a:solidFill>
+          <a:ln>
+            <a:noFill/>
+          </a:ln>
+        </p:spPr>
+        <p:style>
+          <a:lnRef idx="2">
+            <a:schemeClr val="accent1">
+              <a:shade val="50000"/>
+            </a:schemeClr>
+          </a:lnRef>
+          <a:fillRef idx="1">
+            <a:schemeClr val="accent1"/>
+          </a:fillRef>
+          <a:effectRef idx="0">
+            <a:schemeClr val="accent1"/>
+          </a:effectRef>
+          <a:fontRef idx="minor">
+            <a:schemeClr val="lt1"/>
+          </a:fontRef>
+        </p:style>
+        <p:txBody>
+          <a:bodyPr rtlCol="0" anchor="ctr"/>
+          <a:lstStyle/>
+          <a:p>
+            <a:pPr algn="ctr"/>
+            <a:endParaRPr lang="zh-CN" altLang="en-US"/>
+          </a:p>
+        </p:txBody>
+      </p:sp>
+      <p:sp>
+        <p:nvSpPr>
+          <p:cNvPr id="10" name="矩形 9">
+            <a:extLst>
+              <a:ext uri="{FF2B5EF4-FFF2-40B4-BE49-F238E27FC236}">
+                <a16:creationId xmlns:a16="http://schemas.microsoft.com/office/drawing/2014/main" id="{5BBB4D4A-2214-B844-CE3E-91F79B9BA883}"/>
+              </a:ext>
+            </a:extLst>
+          </p:cNvPr>
+          <p:cNvSpPr/>
+          <p:nvPr/>
+        </p:nvSpPr>
+        <p:spPr>
+          <a:xfrm>
+            <a:off x="5480385" y="3487735"/>
+            <a:ext cx="258428" cy="141288"/>
+          </a:xfrm>
+          <a:prstGeom prst="rect">
+            <a:avLst/>
+          </a:prstGeom>
+          <a:solidFill>
+            <a:srgbClr val="FFFF00"/>
+          </a:solidFill>
+          <a:ln>
+            <a:noFill/>
+          </a:ln>
+        </p:spPr>
+        <p:style>
+          <a:lnRef idx="2">
+            <a:schemeClr val="accent1">
+              <a:shade val="50000"/>
+            </a:schemeClr>
+          </a:lnRef>
+          <a:fillRef idx="1">
+            <a:schemeClr val="accent1"/>
+          </a:fillRef>
+          <a:effectRef idx="0">
+            <a:schemeClr val="accent1"/>
+          </a:effectRef>
+          <a:fontRef idx="minor">
+            <a:schemeClr val="lt1"/>
+          </a:fontRef>
+        </p:style>
+        <p:txBody>
+          <a:bodyPr rtlCol="0" anchor="ctr"/>
+          <a:lstStyle/>
+          <a:p>
+            <a:pPr algn="ctr"/>
+            <a:endParaRPr lang="zh-CN" altLang="en-US"/>
+          </a:p>
+        </p:txBody>
+      </p:sp>
+      <p:sp>
+        <p:nvSpPr>
+          <p:cNvPr id="11" name="矩形 10">
+            <a:extLst>
+              <a:ext uri="{FF2B5EF4-FFF2-40B4-BE49-F238E27FC236}">
+                <a16:creationId xmlns:a16="http://schemas.microsoft.com/office/drawing/2014/main" id="{79F67943-12CB-B098-FDE5-699E910D4F2C}"/>
+              </a:ext>
+            </a:extLst>
+          </p:cNvPr>
+          <p:cNvSpPr/>
+          <p:nvPr/>
+        </p:nvSpPr>
+        <p:spPr>
+          <a:xfrm>
+            <a:off x="6625264" y="3125786"/>
+            <a:ext cx="380373" cy="441317"/>
+          </a:xfrm>
+          <a:prstGeom prst="rect">
+            <a:avLst/>
+          </a:prstGeom>
+          <a:solidFill>
+            <a:srgbClr val="FFFF00"/>
+          </a:solidFill>
+          <a:ln>
+            <a:noFill/>
+          </a:ln>
+        </p:spPr>
+        <p:style>
+          <a:lnRef idx="2">
+            <a:schemeClr val="accent1">
+              <a:shade val="50000"/>
+            </a:schemeClr>
+          </a:lnRef>
+          <a:fillRef idx="1">
+            <a:schemeClr val="accent1"/>
+          </a:fillRef>
+          <a:effectRef idx="0">
+            <a:schemeClr val="accent1"/>
+          </a:effectRef>
+          <a:fontRef idx="minor">
+            <a:schemeClr val="lt1"/>
+          </a:fontRef>
+        </p:style>
+        <p:txBody>
+          <a:bodyPr rtlCol="0" anchor="ctr"/>
+          <a:lstStyle/>
+          <a:p>
+            <a:pPr algn="ctr"/>
+            <a:endParaRPr lang="zh-CN" altLang="en-US"/>
+          </a:p>
+        </p:txBody>
+      </p:sp>
+      <p:pic>
+        <p:nvPicPr>
+          <p:cNvPr id="12" name="图片 11">
+            <a:extLst>
+              <a:ext uri="{FF2B5EF4-FFF2-40B4-BE49-F238E27FC236}">
+                <a16:creationId xmlns:a16="http://schemas.microsoft.com/office/drawing/2014/main" id="{7C86F0FF-280F-5C25-54C1-C4823738E4E0}"/>
+              </a:ext>
+            </a:extLst>
+          </p:cNvPr>
+          <p:cNvPicPr>
+            <a:picLocks noChangeAspect="1"/>
+          </p:cNvPicPr>
+          <p:nvPr/>
+        </p:nvPicPr>
+        <p:blipFill>
+          <a:blip r:embed="rId2">
+            <a:extLst>
+              <a:ext uri="{28A0092B-C50C-407E-A947-70E740481C1C}">
+                <a14:useLocalDpi xmlns:a14="http://schemas.microsoft.com/office/drawing/2010/main" val="0"/>
+              </a:ext>
+            </a:extLst>
+          </a:blip>
+          <a:stretch>
+            <a:fillRect/>
+          </a:stretch>
+        </p:blipFill>
+        <p:spPr>
+          <a:xfrm>
+            <a:off x="5027041" y="1153674"/>
+            <a:ext cx="2114550" cy="1019175"/>
+          </a:xfrm>
+          <a:prstGeom prst="rect">
+            <a:avLst/>
+          </a:prstGeom>
+        </p:spPr>
+      </p:pic>
+      <p:cxnSp>
+        <p:nvCxnSpPr>
+          <p:cNvPr id="13" name="直接连接符 12">
+            <a:extLst>
+              <a:ext uri="{FF2B5EF4-FFF2-40B4-BE49-F238E27FC236}">
+                <a16:creationId xmlns:a16="http://schemas.microsoft.com/office/drawing/2014/main" id="{CCF6BEA4-23D4-BCAA-D238-854647EFE363}"/>
+              </a:ext>
+            </a:extLst>
+          </p:cNvPr>
+          <p:cNvCxnSpPr>
+            <a:cxnSpLocks/>
+          </p:cNvCxnSpPr>
+          <p:nvPr/>
+        </p:nvCxnSpPr>
+        <p:spPr>
+          <a:xfrm>
+            <a:off x="1440227" y="4808125"/>
+            <a:ext cx="681898" cy="0"/>
+          </a:xfrm>
+          <a:prstGeom prst="line">
+            <a:avLst/>
+          </a:prstGeom>
+          <a:noFill/>
+          <a:ln w="101600">
+            <a:solidFill>
+              <a:schemeClr val="accent2">
+                <a:alpha val="50000"/>
+              </a:schemeClr>
+            </a:solidFill>
+          </a:ln>
+        </p:spPr>
+        <p:style>
+          <a:lnRef idx="2">
+            <a:schemeClr val="accent1">
+              <a:shade val="50000"/>
+            </a:schemeClr>
+          </a:lnRef>
+          <a:fillRef idx="1">
+            <a:schemeClr val="accent1"/>
+          </a:fillRef>
+          <a:effectRef idx="0">
+            <a:schemeClr val="accent1"/>
+          </a:effectRef>
+          <a:fontRef idx="minor">
+            <a:schemeClr val="lt1"/>
+          </a:fontRef>
+        </p:style>
+      </p:cxnSp>
+      <p:cxnSp>
+        <p:nvCxnSpPr>
+          <p:cNvPr id="14" name="直接连接符 13">
+            <a:extLst>
+              <a:ext uri="{FF2B5EF4-FFF2-40B4-BE49-F238E27FC236}">
+                <a16:creationId xmlns:a16="http://schemas.microsoft.com/office/drawing/2014/main" id="{74598951-D513-50F3-4BFB-777CFCB97C80}"/>
+              </a:ext>
+            </a:extLst>
+          </p:cNvPr>
+          <p:cNvCxnSpPr>
+            <a:cxnSpLocks/>
+          </p:cNvCxnSpPr>
+          <p:nvPr/>
+        </p:nvCxnSpPr>
+        <p:spPr>
+          <a:xfrm>
+            <a:off x="2266268" y="4705350"/>
+            <a:ext cx="0" cy="574928"/>
+          </a:xfrm>
+          <a:prstGeom prst="line">
+            <a:avLst/>
+          </a:prstGeom>
+          <a:noFill/>
+          <a:ln w="101600">
+            <a:solidFill>
+              <a:srgbClr val="00B0F0">
+                <a:alpha val="30000"/>
+              </a:srgbClr>
+            </a:solidFill>
+          </a:ln>
+        </p:spPr>
+        <p:style>
+          <a:lnRef idx="2">
+            <a:schemeClr val="accent1">
+              <a:shade val="50000"/>
+            </a:schemeClr>
+          </a:lnRef>
+          <a:fillRef idx="1">
+            <a:schemeClr val="accent1"/>
+          </a:fillRef>
+          <a:effectRef idx="0">
+            <a:schemeClr val="accent1"/>
+          </a:effectRef>
+          <a:fontRef idx="minor">
+            <a:schemeClr val="lt1"/>
+          </a:fontRef>
+        </p:style>
+      </p:cxnSp>
+      <p:sp>
+        <p:nvSpPr>
+          <p:cNvPr id="15" name="椭圆 14">
+            <a:extLst>
+              <a:ext uri="{FF2B5EF4-FFF2-40B4-BE49-F238E27FC236}">
+                <a16:creationId xmlns:a16="http://schemas.microsoft.com/office/drawing/2014/main" id="{4674A013-34AE-1124-F1D3-55DD1E97D5FC}"/>
+              </a:ext>
+            </a:extLst>
+          </p:cNvPr>
+          <p:cNvSpPr/>
+          <p:nvPr/>
+        </p:nvSpPr>
+        <p:spPr>
+          <a:xfrm>
+            <a:off x="1471611" y="4719230"/>
+            <a:ext cx="176209" cy="176209"/>
+          </a:xfrm>
+          <a:prstGeom prst="ellipse">
+            <a:avLst/>
+          </a:prstGeom>
+          <a:noFill/>
+          <a:ln>
+            <a:solidFill>
+              <a:srgbClr val="C00000"/>
+            </a:solidFill>
+          </a:ln>
+        </p:spPr>
+        <p:style>
+          <a:lnRef idx="2">
+            <a:schemeClr val="accent1">
+              <a:shade val="50000"/>
+            </a:schemeClr>
+          </a:lnRef>
+          <a:fillRef idx="1">
+            <a:schemeClr val="accent1"/>
+          </a:fillRef>
+          <a:effectRef idx="0">
+            <a:schemeClr val="accent1"/>
+          </a:effectRef>
+          <a:fontRef idx="minor">
+            <a:schemeClr val="lt1"/>
+          </a:fontRef>
+        </p:style>
+        <p:txBody>
+          <a:bodyPr rtlCol="0" anchor="ctr"/>
+          <a:lstStyle/>
+          <a:p>
+            <a:pPr algn="ctr"/>
+            <a:endParaRPr lang="zh-CN" altLang="en-US"/>
+          </a:p>
+        </p:txBody>
+      </p:sp>
+      <p:sp>
+        <p:nvSpPr>
+          <p:cNvPr id="16" name="椭圆 15">
+            <a:extLst>
+              <a:ext uri="{FF2B5EF4-FFF2-40B4-BE49-F238E27FC236}">
+                <a16:creationId xmlns:a16="http://schemas.microsoft.com/office/drawing/2014/main" id="{22F5E090-198F-3764-0206-97BF4E493614}"/>
+              </a:ext>
+            </a:extLst>
+          </p:cNvPr>
+          <p:cNvSpPr/>
+          <p:nvPr/>
+        </p:nvSpPr>
+        <p:spPr>
+          <a:xfrm>
+            <a:off x="2178164" y="4705350"/>
+            <a:ext cx="176209" cy="176209"/>
+          </a:xfrm>
+          <a:prstGeom prst="ellipse">
+            <a:avLst/>
+          </a:prstGeom>
+          <a:noFill/>
+          <a:ln>
+            <a:solidFill>
+              <a:srgbClr val="C00000"/>
+            </a:solidFill>
+          </a:ln>
+        </p:spPr>
+        <p:style>
+          <a:lnRef idx="2">
+            <a:schemeClr val="accent1">
+              <a:shade val="50000"/>
+            </a:schemeClr>
+          </a:lnRef>
+          <a:fillRef idx="1">
+            <a:schemeClr val="accent1"/>
+          </a:fillRef>
+          <a:effectRef idx="0">
+            <a:schemeClr val="accent1"/>
+          </a:effectRef>
+          <a:fontRef idx="minor">
+            <a:schemeClr val="lt1"/>
+          </a:fontRef>
+        </p:style>
+        <p:txBody>
+          <a:bodyPr rtlCol="0" anchor="ctr"/>
+          <a:lstStyle/>
+          <a:p>
+            <a:pPr algn="ctr"/>
+            <a:endParaRPr lang="zh-CN" altLang="en-US"/>
+          </a:p>
+        </p:txBody>
+      </p:sp>
+      <p:sp>
+        <p:nvSpPr>
+          <p:cNvPr id="17" name="椭圆 16">
+            <a:extLst>
+              <a:ext uri="{FF2B5EF4-FFF2-40B4-BE49-F238E27FC236}">
+                <a16:creationId xmlns:a16="http://schemas.microsoft.com/office/drawing/2014/main" id="{29D60751-809C-21F4-84E1-AF49E53CCE6D}"/>
+              </a:ext>
+            </a:extLst>
+          </p:cNvPr>
+          <p:cNvSpPr/>
+          <p:nvPr/>
+        </p:nvSpPr>
+        <p:spPr>
+          <a:xfrm>
+            <a:off x="2178164" y="4869657"/>
+            <a:ext cx="176209" cy="176209"/>
+          </a:xfrm>
+          <a:prstGeom prst="ellipse">
+            <a:avLst/>
+          </a:prstGeom>
+          <a:noFill/>
+          <a:ln>
+            <a:solidFill>
+              <a:srgbClr val="00B050"/>
+            </a:solidFill>
+          </a:ln>
+        </p:spPr>
+        <p:style>
+          <a:lnRef idx="2">
+            <a:schemeClr val="accent1">
+              <a:shade val="50000"/>
+            </a:schemeClr>
+          </a:lnRef>
+          <a:fillRef idx="1">
+            <a:schemeClr val="accent1"/>
+          </a:fillRef>
+          <a:effectRef idx="0">
+            <a:schemeClr val="accent1"/>
+          </a:effectRef>
+          <a:fontRef idx="minor">
+            <a:schemeClr val="lt1"/>
+          </a:fontRef>
+        </p:style>
+        <p:txBody>
+          <a:bodyPr rtlCol="0" anchor="ctr"/>
+          <a:lstStyle/>
+          <a:p>
+            <a:pPr algn="ctr"/>
+            <a:endParaRPr lang="zh-CN" altLang="en-US"/>
+          </a:p>
+        </p:txBody>
+      </p:sp>
+      <p:sp>
+        <p:nvSpPr>
+          <p:cNvPr id="18" name="椭圆 17">
+            <a:extLst>
+              <a:ext uri="{FF2B5EF4-FFF2-40B4-BE49-F238E27FC236}">
+                <a16:creationId xmlns:a16="http://schemas.microsoft.com/office/drawing/2014/main" id="{BB6AB859-CB0C-3DF5-51EF-701935FD1D35}"/>
+              </a:ext>
+            </a:extLst>
+          </p:cNvPr>
+          <p:cNvSpPr/>
+          <p:nvPr/>
+        </p:nvSpPr>
+        <p:spPr>
+          <a:xfrm>
+            <a:off x="1688308" y="4719230"/>
+            <a:ext cx="176209" cy="176209"/>
+          </a:xfrm>
+          <a:prstGeom prst="ellipse">
+            <a:avLst/>
+          </a:prstGeom>
+          <a:noFill/>
+          <a:ln>
+            <a:solidFill>
+              <a:srgbClr val="00B050"/>
+            </a:solidFill>
+          </a:ln>
+        </p:spPr>
+        <p:style>
+          <a:lnRef idx="2">
+            <a:schemeClr val="accent1">
+              <a:shade val="50000"/>
+            </a:schemeClr>
+          </a:lnRef>
+          <a:fillRef idx="1">
+            <a:schemeClr val="accent1"/>
+          </a:fillRef>
+          <a:effectRef idx="0">
+            <a:schemeClr val="accent1"/>
+          </a:effectRef>
+          <a:fontRef idx="minor">
+            <a:schemeClr val="lt1"/>
+          </a:fontRef>
+        </p:style>
+        <p:txBody>
+          <a:bodyPr rtlCol="0" anchor="ctr"/>
+          <a:lstStyle/>
+          <a:p>
+            <a:pPr algn="ctr"/>
+            <a:endParaRPr lang="zh-CN" altLang="en-US"/>
+          </a:p>
+        </p:txBody>
+      </p:sp>
+      <p:sp>
+        <p:nvSpPr>
+          <p:cNvPr id="19" name="椭圆 18">
+            <a:extLst>
+              <a:ext uri="{FF2B5EF4-FFF2-40B4-BE49-F238E27FC236}">
+                <a16:creationId xmlns:a16="http://schemas.microsoft.com/office/drawing/2014/main" id="{AFBC6B13-F763-158C-F1EC-EF596F0A4FD3}"/>
+              </a:ext>
+            </a:extLst>
+          </p:cNvPr>
+          <p:cNvSpPr/>
+          <p:nvPr/>
+        </p:nvSpPr>
+        <p:spPr>
+          <a:xfrm>
+            <a:off x="1901870" y="4719230"/>
+            <a:ext cx="176209" cy="176209"/>
+          </a:xfrm>
+          <a:prstGeom prst="ellipse">
+            <a:avLst/>
+          </a:prstGeom>
+          <a:noFill/>
+          <a:ln>
+            <a:solidFill>
+              <a:srgbClr val="00B0F0"/>
+            </a:solidFill>
+          </a:ln>
+        </p:spPr>
+        <p:style>
+          <a:lnRef idx="2">
+            <a:schemeClr val="accent1">
+              <a:shade val="50000"/>
+            </a:schemeClr>
+          </a:lnRef>
+          <a:fillRef idx="1">
+            <a:schemeClr val="accent1"/>
+          </a:fillRef>
+          <a:effectRef idx="0">
+            <a:schemeClr val="accent1"/>
+          </a:effectRef>
+          <a:fontRef idx="minor">
+            <a:schemeClr val="lt1"/>
+          </a:fontRef>
+        </p:style>
+        <p:txBody>
+          <a:bodyPr rtlCol="0" anchor="ctr"/>
+          <a:lstStyle/>
+          <a:p>
+            <a:pPr algn="ctr"/>
+            <a:endParaRPr lang="zh-CN" altLang="en-US"/>
+          </a:p>
+        </p:txBody>
+      </p:sp>
+      <p:sp>
+        <p:nvSpPr>
+          <p:cNvPr id="20" name="椭圆 19">
+            <a:extLst>
+              <a:ext uri="{FF2B5EF4-FFF2-40B4-BE49-F238E27FC236}">
+                <a16:creationId xmlns:a16="http://schemas.microsoft.com/office/drawing/2014/main" id="{5F8E17D6-38A0-5047-B17C-B86FFBB00114}"/>
+              </a:ext>
+            </a:extLst>
+          </p:cNvPr>
+          <p:cNvSpPr/>
+          <p:nvPr/>
+        </p:nvSpPr>
+        <p:spPr>
+          <a:xfrm>
+            <a:off x="2178164" y="5045866"/>
+            <a:ext cx="176209" cy="176209"/>
+          </a:xfrm>
+          <a:prstGeom prst="ellipse">
+            <a:avLst/>
+          </a:prstGeom>
+          <a:noFill/>
+          <a:ln>
+            <a:solidFill>
+              <a:srgbClr val="00B0F0"/>
+            </a:solidFill>
+          </a:ln>
+        </p:spPr>
+        <p:style>
+          <a:lnRef idx="2">
+            <a:schemeClr val="accent1">
+              <a:shade val="50000"/>
+            </a:schemeClr>
+          </a:lnRef>
+          <a:fillRef idx="1">
+            <a:schemeClr val="accent1"/>
+          </a:fillRef>
+          <a:effectRef idx="0">
+            <a:schemeClr val="accent1"/>
+          </a:effectRef>
+          <a:fontRef idx="minor">
+            <a:schemeClr val="lt1"/>
+          </a:fontRef>
+        </p:style>
+        <p:txBody>
+          <a:bodyPr rtlCol="0" anchor="ctr"/>
+          <a:lstStyle/>
+          <a:p>
+            <a:pPr algn="ctr"/>
+            <a:endParaRPr lang="zh-CN" altLang="en-US"/>
+          </a:p>
+        </p:txBody>
+      </p:sp>
+    </p:spTree>
+    <p:extLst>
+      <p:ext uri="{BB962C8B-B14F-4D97-AF65-F5344CB8AC3E}">
+        <p14:creationId xmlns:p14="http://schemas.microsoft.com/office/powerpoint/2010/main" val="515568064"/>
+      </p:ext>
+    </p:extLst>
+  </p:cSld>
+  <p:clrMapOvr>
+    <a:masterClrMapping/>
+  </p:clrMapOvr>
+</p:sld>
+</file>
+
 <file path=ppt/theme/theme1.xml><?xml version="1.0" encoding="utf-8"?>
 <a:theme xmlns:a="http://schemas.openxmlformats.org/drawingml/2006/main" name="Office 主题​​">
   <a:themeElements>
